--- a/documentos/Banner_FECAP_CCOMP5_MEGAVISION.pptx
+++ b/documentos/Banner_FECAP_CCOMP5_MEGAVISION.pptx
@@ -14,17 +14,24 @@
   <p:notesSz cx="6858000" cy="9144000"/>
   <p:embeddedFontLst>
     <p:embeddedFont>
-      <p:font typeface="Inter" panose="02000503000000020004" pitchFamily="2" charset="0"/>
+      <p:font typeface="Calibri" panose="020F0502020204030204" pitchFamily="34" charset="0"/>
       <p:regular r:id="rId4"/>
       <p:bold r:id="rId5"/>
       <p:italic r:id="rId6"/>
       <p:boldItalic r:id="rId7"/>
     </p:embeddedFont>
     <p:embeddedFont>
-      <p:font typeface="Open Sans" panose="020B0606030504020204" pitchFamily="34" charset="0"/>
+      <p:font typeface="Inter" panose="020B0604020202020204" charset="0"/>
       <p:regular r:id="rId8"/>
       <p:bold r:id="rId9"/>
-      <p:boldItalic r:id="rId10"/>
+      <p:italic r:id="rId10"/>
+      <p:boldItalic r:id="rId11"/>
+    </p:embeddedFont>
+    <p:embeddedFont>
+      <p:font typeface="Open Sans" panose="020B0604020202020204" charset="0"/>
+      <p:regular r:id="rId12"/>
+      <p:bold r:id="rId13"/>
+      <p:boldItalic r:id="rId14"/>
     </p:embeddedFont>
   </p:embeddedFontLst>
   <p:defaultTextStyle>
@@ -272,7 +279,7 @@
       </p15:sldGuideLst>
     </p:ext>
     <p:ext uri="GoogleSlidesCustomDataVersion2">
-      <go:slidesCustomData xmlns:go="http://customooxmlschemas.google.com/" xmlns:ahyp="http://schemas.microsoft.com/office/drawing/2018/hyperlinkcolor" xmlns:p15="http://schemas.microsoft.com/office/powerpoint/2012/main" xmlns:p14="http://schemas.microsoft.com/office/powerpoint/2010/main" xmlns:com="http://schemas.openxmlformats.org/drawingml/2006/compatibility" xmlns:pvml="urn:schemas-microsoft-com:office:powerpoint" xmlns:v="urn:schemas-microsoft-com:vml" xmlns:o="urn:schemas-microsoft-com:office:office" xmlns:dgm="http://schemas.openxmlformats.org/drawingml/2006/diagram" xmlns:c="http://schemas.openxmlformats.org/drawingml/2006/chart" xmlns:mv="urn:schemas-microsoft-com:mac:vml" xmlns:mc="http://schemas.openxmlformats.org/markup-compatibility/2006" xmlns="" r:id="rId13" roundtripDataSignature="AMtx7mi+9yr4mDS8zg5+kfXTqvtBuST67g=="/>
+      <go:slidesCustomData xmlns="" xmlns:mc="http://schemas.openxmlformats.org/markup-compatibility/2006" xmlns:mv="urn:schemas-microsoft-com:mac:vml" xmlns:c="http://schemas.openxmlformats.org/drawingml/2006/chart" xmlns:dgm="http://schemas.openxmlformats.org/drawingml/2006/diagram" xmlns:o="urn:schemas-microsoft-com:office:office" xmlns:v="urn:schemas-microsoft-com:vml" xmlns:pvml="urn:schemas-microsoft-com:office:powerpoint" xmlns:com="http://schemas.openxmlformats.org/drawingml/2006/compatibility" xmlns:p14="http://schemas.microsoft.com/office/powerpoint/2010/main" xmlns:p15="http://schemas.microsoft.com/office/powerpoint/2012/main" xmlns:ahyp="http://schemas.microsoft.com/office/drawing/2018/hyperlinkcolor" xmlns:go="http://customooxmlschemas.google.com/" r:id="rId15" roundtripDataSignature="AMtx7mi+9yr4mDS8zg5+kfXTqvtBuST67g=="/>
     </p:ext>
   </p:extLst>
 </p:presentation>
@@ -12344,7 +12351,7 @@
         </p:nvGrpSpPr>
         <p:grpSpPr>
           <a:xfrm rot="-5400000">
-            <a:off x="2494601" y="7477176"/>
+            <a:off x="2494601" y="7509833"/>
             <a:ext cx="10206805" cy="14355430"/>
             <a:chOff x="0" y="-47625"/>
             <a:chExt cx="958980" cy="1348764"/>
@@ -12791,19 +12798,7 @@
                 <a:cs typeface="Open Sans"/>
                 <a:sym typeface="Open Sans"/>
               </a:rPr>
-              <a:t>Lucas Oliveira, Matheus Rossaneze, Pedro Schaurich Maia, Phelipe </a:t>
-            </a:r>
-            <a:r>
-              <a:rPr lang="pt-BR" sz="4000" b="1" dirty="0" err="1">
-                <a:solidFill>
-                  <a:srgbClr val="000000"/>
-                </a:solidFill>
-                <a:latin typeface="Open Sans"/>
-                <a:ea typeface="Open Sans"/>
-                <a:cs typeface="Open Sans"/>
-                <a:sym typeface="Open Sans"/>
-              </a:rPr>
-              <a:t>Antonio</a:t>
+              <a:t>Lucas Oliveira, Matheus Rossaneze, Pedro Schaurich Maia, Phelipe Antonio</a:t>
             </a:r>
             <a:endParaRPr sz="4000" dirty="0"/>
           </a:p>
@@ -12856,7 +12851,7 @@
         </p:nvSpPr>
         <p:spPr>
           <a:xfrm>
-            <a:off x="15353293" y="15839628"/>
+            <a:off x="15353293" y="15937599"/>
             <a:ext cx="12433206" cy="533095"/>
           </a:xfrm>
           <a:prstGeom prst="rect">
@@ -12905,7 +12900,7 @@
         </p:nvSpPr>
         <p:spPr>
           <a:xfrm>
-            <a:off x="15353293" y="23110704"/>
+            <a:off x="15353293" y="23404617"/>
             <a:ext cx="12433206" cy="533095"/>
           </a:xfrm>
           <a:prstGeom prst="rect">
@@ -13219,7 +13214,7 @@
         <p:spPr>
           <a:xfrm>
             <a:off x="15966975" y="31719851"/>
-            <a:ext cx="11400000" cy="6401753"/>
+            <a:ext cx="11400000" cy="6217087"/>
           </a:xfrm>
           <a:prstGeom prst="rect">
             <a:avLst/>
@@ -13283,7 +13278,7 @@
           </a:p>
           <a:p>
             <a:pPr algn="just"/>
-            <a:endParaRPr lang="en-US" sz="3200" dirty="0"/>
+            <a:endParaRPr lang="en-US" sz="2000" dirty="0"/>
           </a:p>
           <a:p>
             <a:pPr algn="just"/>
@@ -13354,7 +13349,7 @@
           </a:p>
           <a:p>
             <a:pPr algn="just"/>
-            <a:endParaRPr lang="en-US" sz="3200" dirty="0"/>
+            <a:endParaRPr lang="en-US" sz="2000" dirty="0"/>
           </a:p>
           <a:p>
             <a:pPr algn="just"/>
@@ -13650,8 +13645,8 @@
         </p:nvSpPr>
         <p:spPr>
           <a:xfrm>
-            <a:off x="1595870" y="10749184"/>
-            <a:ext cx="12562800" cy="8618065"/>
+            <a:off x="1595870" y="11249847"/>
+            <a:ext cx="12562800" cy="7201972"/>
           </a:xfrm>
           <a:prstGeom prst="rect">
             <a:avLst/>
@@ -13670,42 +13665,19 @@
             <a:pPr algn="just"/>
             <a:r>
               <a:rPr lang="pt-BR" sz="3200" dirty="0"/>
-              <a:t>Campanhas solidárias de arrecadação de alimentos, como o Lideranças Empáticas (LE) da FECAP, dependem hoje de processos inteiramente manuais para registrar o que é coletado: voluntários contam pacote por pacote, em condições de cansaço e pressão de tempo, e anotam os resultados em planilhas ou cadernos. Esse modelo cria inconsistências entre equipes, erros de registro e disputas sobre os totais arrecadados, comprometendo a transparência e a motivação dos participantes.</a:t>
+              <a:t>Campanhas como o Lideranças Empáticas (LE) da FECAP ainda dependem de um processo frágil: voluntários contam pacote por pacote, em condições de cansaço e pressão de tempo, e registram os resultados em planilhas ou cadernos. O efeito é previsível — totais inconsistentes entre equipes, registros perdidos e disputas sobre os números arrecadados, que corroem tanto a transparência quanto a motivação de quem participa.</a:t>
             </a:r>
           </a:p>
           <a:p>
             <a:pPr algn="just"/>
-            <a:endParaRPr lang="pt-BR" sz="3200" dirty="0"/>
+            <a:endParaRPr lang="pt-BR" sz="2000" dirty="0"/>
           </a:p>
           <a:p>
             <a:pPr algn="just"/>
             <a:r>
               <a:rPr lang="pt-BR" sz="3200" dirty="0"/>
-              <a:t>O contexto torna o problema ainda mais urgente: segundo o IBGE (PNAD Contínua, 2024), 24,2% dos domicílios brasileiros ainda enfrentam algum grau de insegurança alimentar, com 2,5 milhões de famílias em situação grave — aquela em que a fome é uma experiência real no cotidiano. Maximizar a eficiência e a rastreabilidade das doações arrecadadas é, portanto, uma questão de responsabilidade social.</a:t>
+              <a:t>O problema ganha outra dimensão quando colocado em perspectiva: segundo a PNAD Contínua de 2024, 24,2% dos domicílios brasileiros enfrentam algum grau de insegurança alimentar, com 2,5 milhões de famílias em situação grave — aquela em que a fome é uma realidade cotidiana. Nesse cenário, garantir a rastreabilidade de cada doação deixa de ser uma questão operacional e passa a ser uma responsabilidade social concreta.</a:t>
             </a:r>
-          </a:p>
-          <a:p>
-            <a:pPr marL="0" marR="0" lvl="0" indent="0" algn="just" rtl="0">
-              <a:lnSpc>
-                <a:spcPct val="140000"/>
-              </a:lnSpc>
-              <a:spcBef>
-                <a:spcPts val="0"/>
-              </a:spcBef>
-              <a:spcAft>
-                <a:spcPts val="0"/>
-              </a:spcAft>
-              <a:buNone/>
-            </a:pPr>
-            <a:endParaRPr sz="3430" dirty="0">
-              <a:solidFill>
-                <a:srgbClr val="000000"/>
-              </a:solidFill>
-              <a:latin typeface="Open Sans"/>
-              <a:ea typeface="Open Sans"/>
-              <a:cs typeface="Open Sans"/>
-              <a:sym typeface="Open Sans"/>
-            </a:endParaRPr>
           </a:p>
         </p:txBody>
       </p:sp>
@@ -13718,7 +13690,7 @@
         <p:spPr>
           <a:xfrm>
             <a:off x="1570066" y="21125709"/>
-            <a:ext cx="12562800" cy="9602950"/>
+            <a:ext cx="12562800" cy="8494633"/>
           </a:xfrm>
           <a:prstGeom prst="rect">
             <a:avLst/>
@@ -13740,83 +13712,52 @@
               <a:t>O </a:t>
             </a:r>
             <a:r>
-              <a:rPr lang="pt-BR" sz="3200" i="1" dirty="0" err="1"/>
+              <a:rPr lang="pt-BR" sz="3200" dirty="0" err="1"/>
               <a:t>MegaVision</a:t>
             </a:r>
             <a:r>
               <a:rPr lang="pt-BR" sz="3200" dirty="0"/>
-              <a:t> é um sistema integrado de Visão Computacional e Inteligência Artificial desenvolvido para automatizar a identificação, classificação e contagem de pacotes de alimentos doados. Uma câmera posicionada sobre uma rampa captura cada item que passa pelo ponto de coleta. Um modelo de detecção de objetos, treinado na família YOLO da </a:t>
-            </a:r>
-            <a:r>
-              <a:rPr lang="pt-BR" sz="3200" i="1" dirty="0" err="1"/>
-              <a:t>Ultralytics</a:t>
-            </a:r>
-            <a:r>
-              <a:rPr lang="pt-BR" sz="3200" dirty="0"/>
-              <a:t>, classifica cada pacote em categorias como Arroz, Feijão e Outros em tempo real.</a:t>
+              <a:t> é um sistema integrado de Visão Computacional e Inteligência Artificial desenvolvido para automatizar a identificação, classificação e contagem de pacotes de alimentos doados. Uma câmera posicionada sobre uma rampa captura cada item que passa pelo ponto de coleta, enquanto um modelo de detecção de objetos classifica cada pacote em categorias como arroz, feijão, macarrão, óleo e açúcar.</a:t>
             </a:r>
           </a:p>
           <a:p>
             <a:pPr algn="just"/>
-            <a:endParaRPr lang="pt-BR" sz="3200" dirty="0"/>
+            <a:endParaRPr lang="pt-BR" sz="2000" dirty="0"/>
           </a:p>
           <a:p>
             <a:pPr algn="just"/>
             <a:r>
               <a:rPr lang="pt-BR" sz="3200" dirty="0"/>
-              <a:t>Os eventos de contagem são persistidos automaticamente em banco de dados na nuvem (</a:t>
+              <a:t>Cada evento de contagem é registrado automaticamente em banco de dados na nuvem (</a:t>
             </a:r>
             <a:r>
-              <a:rPr lang="pt-BR" sz="3200" i="1" dirty="0" err="1"/>
+              <a:rPr lang="pt-BR" sz="3200" dirty="0" err="1"/>
               <a:t>Supabase</a:t>
             </a:r>
             <a:r>
               <a:rPr lang="pt-BR" sz="3200" dirty="0"/>
-              <a:t>), vinculados à equipe arrecadadora, ao tipo de alimento e seu peso estimado. Um painel web — desenvolvido em </a:t>
+              <a:t>), vinculado à equipe arrecadadora, ao tipo de alimento e ao peso estimado. Um painel web desenvolvido em </a:t>
             </a:r>
             <a:r>
-              <a:rPr lang="pt-BR" sz="3200" i="1" dirty="0" err="1"/>
+              <a:rPr lang="pt-BR" sz="3200" dirty="0" err="1"/>
               <a:t>React</a:t>
             </a:r>
             <a:r>
               <a:rPr lang="pt-BR" sz="3200" dirty="0"/>
-              <a:t> — permite ao coordenador acompanhar, ao vivo e de forma auditável, o progresso de cada equipe com gráficos comparativos e totalizadores.</a:t>
+              <a:t> permite ao coordenador acompanhar, ao vivo o progresso de cada equipe, com gráficos comparativos e totalizadores atualizados à medida que as doações chegam.</a:t>
             </a:r>
           </a:p>
           <a:p>
             <a:pPr algn="just"/>
-            <a:endParaRPr lang="pt-BR" sz="3200" dirty="0"/>
+            <a:endParaRPr lang="pt-BR" sz="2000" dirty="0"/>
           </a:p>
           <a:p>
             <a:pPr algn="just"/>
             <a:r>
               <a:rPr lang="pt-BR" sz="3200" dirty="0"/>
-              <a:t>A solução elimina erros humanos na contagem, garante rastreabilidade e cria um processo justo e transparente entre as equipes.</a:t>
+              <a:t>A solução reduz erros humanos na contagem, melhorando a rastreabilidade, e auxiliando na criação de um processo mais justo e transparente entre as equipes.</a:t>
             </a:r>
             <a:endParaRPr dirty="0"/>
-          </a:p>
-          <a:p>
-            <a:pPr marL="0" marR="0" lvl="0" indent="0" algn="just" rtl="0">
-              <a:lnSpc>
-                <a:spcPct val="140000"/>
-              </a:lnSpc>
-              <a:spcBef>
-                <a:spcPts val="0"/>
-              </a:spcBef>
-              <a:spcAft>
-                <a:spcPts val="0"/>
-              </a:spcAft>
-              <a:buNone/>
-            </a:pPr>
-            <a:endParaRPr sz="3430" dirty="0">
-              <a:solidFill>
-                <a:srgbClr val="000000"/>
-              </a:solidFill>
-              <a:latin typeface="Open Sans"/>
-              <a:ea typeface="Open Sans"/>
-              <a:cs typeface="Open Sans"/>
-              <a:sym typeface="Open Sans"/>
-            </a:endParaRPr>
           </a:p>
         </p:txBody>
       </p:sp>
@@ -13929,8 +13870,8 @@
         </p:nvSpPr>
         <p:spPr>
           <a:xfrm>
-            <a:off x="15617816" y="10880630"/>
-            <a:ext cx="11904157" cy="4924425"/>
+            <a:off x="15617816" y="11403142"/>
+            <a:ext cx="11904157" cy="3939540"/>
           </a:xfrm>
           <a:prstGeom prst="rect">
             <a:avLst/>
@@ -13949,37 +13890,17 @@
             <a:pPr algn="just"/>
             <a:r>
               <a:rPr lang="pt-BR" sz="3200" dirty="0"/>
-              <a:t>O sistema </a:t>
-            </a:r>
-            <a:r>
-              <a:rPr lang="pt-BR" sz="3200" i="1" dirty="0" err="1"/>
-              <a:t>MegaVision</a:t>
-            </a:r>
-            <a:r>
-              <a:rPr lang="pt-BR" sz="3200" dirty="0"/>
-              <a:t> entrega um pipeline funcional do tipo câmera → IA → banco de dados → painel, com as seguintes capacidades demonstradas:</a:t>
+              <a:t>O sistema entrega um pipeline completo: câmera, IA, banco de dados e painel. Pacotes de Arroz, Feijão e outros itens são classificados por equipe em tempo real, com data, hora e peso estimado registrados automaticamente a cada evento.</a:t>
             </a:r>
           </a:p>
           <a:p>
             <a:pPr algn="just"/>
-            <a:r>
-              <a:rPr lang="pt-BR" sz="3200" b="1" dirty="0"/>
-              <a:t>Contagem automatizada e em tempo real:</a:t>
-            </a:r>
+            <a:endParaRPr lang="pt-BR" sz="3200" dirty="0"/>
+          </a:p>
+          <a:p>
             <a:r>
               <a:rPr lang="pt-BR" sz="3200" dirty="0"/>
-              <a:t> pacotes de Arroz, Feijão e outros itens são classificados e contabilizados por equipe com registro de data/hora e peso estimado a cada evento salvo.</a:t>
-            </a:r>
-          </a:p>
-          <a:p>
-            <a:pPr algn="just"/>
-            <a:r>
-              <a:rPr lang="pt-BR" sz="3200" b="1" dirty="0"/>
-              <a:t>Painel do coordenador:</a:t>
-            </a:r>
-            <a:r>
-              <a:rPr lang="pt-BR" sz="3200" dirty="0"/>
-              <a:t> dashboard web com métricas por equipe (total de itens, peso total, distribuição por tipo de alimento em gráfico de barras), acessível de qualquer dispositivo com conexão à internet.</a:t>
+              <a:t>O coordenador acompanha o andamento por um dashboard web, com total de itens, peso acumulado, distribuição por tipo. Sendo acessível em qualquer dispositivo com internet.</a:t>
             </a:r>
           </a:p>
         </p:txBody>
@@ -13992,8 +13913,8 @@
         </p:nvSpPr>
         <p:spPr>
           <a:xfrm>
-            <a:off x="15714839" y="24195810"/>
-            <a:ext cx="11652014" cy="5416868"/>
+            <a:off x="15714839" y="24489723"/>
+            <a:ext cx="11652014" cy="4924425"/>
           </a:xfrm>
           <a:prstGeom prst="rect">
             <a:avLst/>
@@ -14011,12 +13932,8 @@
           <a:p>
             <a:pPr algn="just"/>
             <a:r>
-              <a:rPr lang="pt-BR" sz="3200" b="1" dirty="0"/>
-              <a:t>Base técnica validada pela literatura:</a:t>
-            </a:r>
-            <a:r>
               <a:rPr lang="pt-BR" sz="3200" dirty="0"/>
-              <a:t> modelos YOLO aplicados à detecção e contagem de alimentos em ambientes controlados atingem </a:t>
+              <a:t>A precisão do modelo tem respaldo na literatura. Aplicações de YOLO para detecção de alimentos em ambientes controlados atingem </a:t>
             </a:r>
             <a:r>
               <a:rPr lang="pt-BR" sz="3200" dirty="0" err="1"/>
@@ -14024,15 +13941,15 @@
             </a:r>
             <a:r>
               <a:rPr lang="pt-BR" sz="3200" dirty="0"/>
-              <a:t> médio de 0,873 (FAUSTINO et al., 2024, </a:t>
+              <a:t> médio de 0,873 (Faustino et al., 2024), e sistemas de contagem por Visão Computacional em operação industrial já reportam acurácia acima de 95% (</a:t>
             </a:r>
             <a:r>
               <a:rPr lang="pt-BR" sz="3200" dirty="0" err="1"/>
-              <a:t>PubMed</a:t>
+              <a:t>Pix</a:t>
             </a:r>
             <a:r>
               <a:rPr lang="pt-BR" sz="3200" dirty="0"/>
-              <a:t> Central). Sistemas de contagem por Visão Computacional em operação industrial reportam acurácia superior a 95% (Pix Force, 2023).</a:t>
+              <a:t> Force, 2023).</a:t>
             </a:r>
           </a:p>
           <a:p>
@@ -14042,12 +13959,16 @@
           <a:p>
             <a:pPr algn="just"/>
             <a:r>
-              <a:rPr lang="pt-BR" sz="3200" b="1" dirty="0"/>
-              <a:t>Eliminação de retrabalho:</a:t>
+              <a:rPr lang="pt-BR" sz="3200" dirty="0"/>
+              <a:t>O que antes dependia de contagem manual, planilha e conciliação posterior passa a acontecer de forma contínua e </a:t>
+            </a:r>
+            <a:r>
+              <a:rPr lang="pt-BR" sz="3200" dirty="0" err="1"/>
+              <a:t>auditável</a:t>
             </a:r>
             <a:r>
               <a:rPr lang="pt-BR" sz="3200" dirty="0"/>
-              <a:t> o processo que antes exigia anotação manual, consolidação em planilhas e conciliação posterior entre equipes passa a ser registrado automaticamente, com auditoria permanente.</a:t>
+              <a:t>. Reduzindo retrabalho e diminuindo a margem de erros.</a:t>
             </a:r>
           </a:p>
         </p:txBody>
@@ -14332,6 +14253,36 @@
               </a14:hiddenFill>
             </a:ext>
           </a:extLst>
+        </p:spPr>
+      </p:pic>
+      <p:pic>
+        <p:nvPicPr>
+          <p:cNvPr id="2" name="Imagem 1">
+            <a:extLst>
+              <a:ext uri="{FF2B5EF4-FFF2-40B4-BE49-F238E27FC236}">
+                <a16:creationId xmlns:a16="http://schemas.microsoft.com/office/drawing/2014/main" id="{6D65AD38-E848-428A-B272-EBE10B3FC1FC}"/>
+              </a:ext>
+            </a:extLst>
+          </p:cNvPr>
+          <p:cNvPicPr>
+            <a:picLocks noChangeAspect="1"/>
+          </p:cNvPicPr>
+          <p:nvPr/>
+        </p:nvPicPr>
+        <p:blipFill>
+          <a:blip r:embed="rId13"/>
+          <a:stretch>
+            <a:fillRect/>
+          </a:stretch>
+        </p:blipFill>
+        <p:spPr>
+          <a:xfrm>
+            <a:off x="15542377" y="17013848"/>
+            <a:ext cx="12103371" cy="5672026"/>
+          </a:xfrm>
+          <a:prstGeom prst="rect">
+            <a:avLst/>
+          </a:prstGeom>
         </p:spPr>
       </p:pic>
     </p:spTree>

--- a/documentos/Banner_FECAP_CCOMP5_MEGAVISION.pptx
+++ b/documentos/Banner_FECAP_CCOMP5_MEGAVISION.pptx
@@ -14,24 +14,17 @@
   <p:notesSz cx="6858000" cy="9144000"/>
   <p:embeddedFontLst>
     <p:embeddedFont>
-      <p:font typeface="Calibri" panose="020F0502020204030204" pitchFamily="34" charset="0"/>
+      <p:font typeface="Inter" panose="02000503000000020004" pitchFamily="2" charset="0"/>
       <p:regular r:id="rId4"/>
       <p:bold r:id="rId5"/>
       <p:italic r:id="rId6"/>
       <p:boldItalic r:id="rId7"/>
     </p:embeddedFont>
     <p:embeddedFont>
-      <p:font typeface="Inter" panose="020B0604020202020204" charset="0"/>
+      <p:font typeface="Open Sans" panose="020B0606030504020204" pitchFamily="34" charset="0"/>
       <p:regular r:id="rId8"/>
       <p:bold r:id="rId9"/>
-      <p:italic r:id="rId10"/>
-      <p:boldItalic r:id="rId11"/>
-    </p:embeddedFont>
-    <p:embeddedFont>
-      <p:font typeface="Open Sans" panose="020B0604020202020204" charset="0"/>
-      <p:regular r:id="rId12"/>
-      <p:bold r:id="rId13"/>
-      <p:boldItalic r:id="rId14"/>
+      <p:boldItalic r:id="rId10"/>
     </p:embeddedFont>
   </p:embeddedFontLst>
   <p:defaultTextStyle>
@@ -279,7 +272,7 @@
       </p15:sldGuideLst>
     </p:ext>
     <p:ext uri="GoogleSlidesCustomDataVersion2">
-      <go:slidesCustomData xmlns="" xmlns:mc="http://schemas.openxmlformats.org/markup-compatibility/2006" xmlns:mv="urn:schemas-microsoft-com:mac:vml" xmlns:c="http://schemas.openxmlformats.org/drawingml/2006/chart" xmlns:dgm="http://schemas.openxmlformats.org/drawingml/2006/diagram" xmlns:o="urn:schemas-microsoft-com:office:office" xmlns:v="urn:schemas-microsoft-com:vml" xmlns:pvml="urn:schemas-microsoft-com:office:powerpoint" xmlns:com="http://schemas.openxmlformats.org/drawingml/2006/compatibility" xmlns:p14="http://schemas.microsoft.com/office/powerpoint/2010/main" xmlns:p15="http://schemas.microsoft.com/office/powerpoint/2012/main" xmlns:ahyp="http://schemas.microsoft.com/office/drawing/2018/hyperlinkcolor" xmlns:go="http://customooxmlschemas.google.com/" r:id="rId15" roundtripDataSignature="AMtx7mi+9yr4mDS8zg5+kfXTqvtBuST67g=="/>
+      <go:slidesCustomData xmlns:go="http://customooxmlschemas.google.com/" xmlns:ahyp="http://schemas.microsoft.com/office/drawing/2018/hyperlinkcolor" xmlns:p15="http://schemas.microsoft.com/office/powerpoint/2012/main" xmlns:p14="http://schemas.microsoft.com/office/powerpoint/2010/main" xmlns:com="http://schemas.openxmlformats.org/drawingml/2006/compatibility" xmlns:pvml="urn:schemas-microsoft-com:office:powerpoint" xmlns:v="urn:schemas-microsoft-com:vml" xmlns:o="urn:schemas-microsoft-com:office:office" xmlns:dgm="http://schemas.openxmlformats.org/drawingml/2006/diagram" xmlns:c="http://schemas.openxmlformats.org/drawingml/2006/chart" xmlns:mv="urn:schemas-microsoft-com:mac:vml" xmlns:mc="http://schemas.openxmlformats.org/markup-compatibility/2006" xmlns="" r:id="rId15" roundtripDataSignature="AMtx7mi+9yr4mDS8zg5+kfXTqvtBuST67g=="/>
     </p:ext>
   </p:extLst>
 </p:presentation>
@@ -14285,6 +14278,101 @@
           </a:prstGeom>
         </p:spPr>
       </p:pic>
+      <p:sp>
+        <p:nvSpPr>
+          <p:cNvPr id="6" name="Google Shape;138;p1">
+            <a:extLst>
+              <a:ext uri="{FF2B5EF4-FFF2-40B4-BE49-F238E27FC236}">
+                <a16:creationId xmlns:a16="http://schemas.microsoft.com/office/drawing/2014/main" id="{9AFB159B-327D-CB61-2E23-3AC978BC1DDA}"/>
+              </a:ext>
+            </a:extLst>
+          </p:cNvPr>
+          <p:cNvSpPr txBox="1"/>
+          <p:nvPr/>
+        </p:nvSpPr>
+        <p:spPr>
+          <a:xfrm>
+            <a:off x="136933" y="39681833"/>
+            <a:ext cx="28242600" cy="1830600"/>
+          </a:xfrm>
+          <a:prstGeom prst="rect">
+            <a:avLst/>
+          </a:prstGeom>
+          <a:noFill/>
+          <a:ln>
+            <a:noFill/>
+          </a:ln>
+        </p:spPr>
+        <p:txBody>
+          <a:bodyPr spcFirstLastPara="1" wrap="square" lIns="0" tIns="0" rIns="0" bIns="0" anchor="t" anchorCtr="0">
+            <a:spAutoFit/>
+          </a:bodyPr>
+          <a:lstStyle/>
+          <a:p>
+            <a:pPr marL="0" marR="0" lvl="0" indent="0" algn="ctr" rtl="0">
+              <a:lnSpc>
+                <a:spcPct val="140000"/>
+              </a:lnSpc>
+              <a:spcBef>
+                <a:spcPts val="0"/>
+              </a:spcBef>
+              <a:spcAft>
+                <a:spcPts val="0"/>
+              </a:spcAft>
+              <a:buNone/>
+            </a:pPr>
+            <a:r>
+              <a:rPr lang="pt-BR" sz="4955" b="1" dirty="0">
+                <a:latin typeface="Open Sans"/>
+                <a:ea typeface="Open Sans"/>
+                <a:cs typeface="Open Sans"/>
+                <a:sym typeface="Open Sans"/>
+              </a:rPr>
+              <a:t>IV </a:t>
+            </a:r>
+            <a:r>
+              <a:rPr lang="pt-BR" sz="4955" b="1" dirty="0">
+                <a:solidFill>
+                  <a:srgbClr val="000000"/>
+                </a:solidFill>
+                <a:latin typeface="Open Sans"/>
+                <a:ea typeface="Open Sans"/>
+                <a:cs typeface="Open Sans"/>
+                <a:sym typeface="Open Sans"/>
+              </a:rPr>
+              <a:t>SEMANA FECAP DE TECNOLOGIA - 2026</a:t>
+            </a:r>
+            <a:endParaRPr lang="pt-BR" dirty="0"/>
+          </a:p>
+          <a:p>
+            <a:pPr marL="0" marR="0" lvl="0" indent="0" algn="ctr" rtl="0">
+              <a:lnSpc>
+                <a:spcPct val="140000"/>
+              </a:lnSpc>
+              <a:spcBef>
+                <a:spcPts val="0"/>
+              </a:spcBef>
+              <a:spcAft>
+                <a:spcPts val="0"/>
+              </a:spcAft>
+              <a:buNone/>
+            </a:pPr>
+            <a:r>
+              <a:rPr lang="pt-BR" sz="4955" dirty="0">
+                <a:solidFill>
+                  <a:srgbClr val="000000"/>
+                </a:solidFill>
+                <a:latin typeface="Open Sans"/>
+                <a:ea typeface="Open Sans"/>
+                <a:cs typeface="Open Sans"/>
+                <a:sym typeface="Open Sans"/>
+              </a:rPr>
+              <a:t>Fundação Escola de Comércio Álvares Penteado - FECAP</a:t>
+            </a:r>
+            <a:endParaRPr lang="pt-BR" dirty="0"/>
+          </a:p>
+        </p:txBody>
+      </p:sp>
     </p:spTree>
   </p:cSld>
   <p:clrMapOvr>
